--- a/theory_03-wearable_sensors_part_2/theory_03-wearable_sensors_part_2.pptx
+++ b/theory_03-wearable_sensors_part_2/theory_03-wearable_sensors_part_2.pptx
@@ -230,7 +230,7 @@
           <a:p>
             <a:fld id="{5BDD61AD-5ABE-41AD-B3EF-A04A3105339F}" type="datetimeFigureOut">
               <a:rPr lang="en-GB" smtClean="0"/>
-              <a:t>11/02/2025</a:t>
+              <a:t>11/03/2025</a:t>
             </a:fld>
             <a:endParaRPr lang="en-GB"/>
           </a:p>
@@ -3280,8 +3280,8 @@
           </a:p>
         </p:txBody>
       </p:sp>
-      <mc:AlternateContent xmlns:mc="http://schemas.openxmlformats.org/markup-compatibility/2006">
-        <mc:Choice xmlns:a14="http://schemas.microsoft.com/office/drawing/2010/main" Requires="a14">
+      <mc:AlternateContent xmlns:mc="http://schemas.openxmlformats.org/markup-compatibility/2006" xmlns:a14="http://schemas.microsoft.com/office/drawing/2010/main">
+        <mc:Choice Requires="a14">
           <p:sp>
             <p:nvSpPr>
               <p:cNvPr id="3" name="Segnaposto contenuto 2"/>
@@ -3424,7 +3424,7 @@
             </p:txBody>
           </p:sp>
         </mc:Choice>
-        <mc:Fallback>
+        <mc:Fallback xmlns="">
           <p:sp>
             <p:nvSpPr>
               <p:cNvPr id="3" name="Segnaposto contenuto 2"/>
@@ -3636,8 +3636,8 @@
           </a:fontRef>
         </p:style>
       </p:cxnSp>
-      <mc:AlternateContent xmlns:mc="http://schemas.openxmlformats.org/markup-compatibility/2006">
-        <mc:Choice xmlns:a14="http://schemas.microsoft.com/office/drawing/2010/main" Requires="a14">
+      <mc:AlternateContent xmlns:mc="http://schemas.openxmlformats.org/markup-compatibility/2006" xmlns:a14="http://schemas.microsoft.com/office/drawing/2010/main">
+        <mc:Choice Requires="a14">
           <p:sp>
             <p:nvSpPr>
               <p:cNvPr id="35" name="Rettangolo 34"/>
@@ -3712,7 +3712,7 @@
             </p:txBody>
           </p:sp>
         </mc:Choice>
-        <mc:Fallback>
+        <mc:Fallback xmlns="">
           <p:sp>
             <p:nvSpPr>
               <p:cNvPr id="35" name="Rettangolo 34"/>
@@ -4571,8 +4571,8 @@
           </a:fontRef>
         </p:style>
       </p:cxnSp>
-      <mc:AlternateContent xmlns:mc="http://schemas.openxmlformats.org/markup-compatibility/2006">
-        <mc:Choice xmlns:a14="http://schemas.microsoft.com/office/drawing/2010/main" Requires="a14">
+      <mc:AlternateContent xmlns:mc="http://schemas.openxmlformats.org/markup-compatibility/2006" xmlns:a14="http://schemas.microsoft.com/office/drawing/2010/main">
+        <mc:Choice Requires="a14">
           <p:sp>
             <p:nvSpPr>
               <p:cNvPr id="29" name="CasellaDiTesto 28"/>
@@ -4630,7 +4630,7 @@
             </p:txBody>
           </p:sp>
         </mc:Choice>
-        <mc:Fallback>
+        <mc:Fallback xmlns="">
           <p:sp>
             <p:nvSpPr>
               <p:cNvPr id="29" name="CasellaDiTesto 28"/>
@@ -4669,8 +4669,8 @@
           </p:sp>
         </mc:Fallback>
       </mc:AlternateContent>
-      <mc:AlternateContent xmlns:mc="http://schemas.openxmlformats.org/markup-compatibility/2006">
-        <mc:Choice xmlns:a14="http://schemas.microsoft.com/office/drawing/2010/main" Requires="a14">
+      <mc:AlternateContent xmlns:mc="http://schemas.openxmlformats.org/markup-compatibility/2006" xmlns:a14="http://schemas.microsoft.com/office/drawing/2010/main">
+        <mc:Choice Requires="a14">
           <p:sp>
             <p:nvSpPr>
               <p:cNvPr id="30" name="CasellaDiTesto 29"/>
@@ -4716,7 +4716,7 @@
             </p:txBody>
           </p:sp>
         </mc:Choice>
-        <mc:Fallback>
+        <mc:Fallback xmlns="">
           <p:sp>
             <p:nvSpPr>
               <p:cNvPr id="30" name="CasellaDiTesto 29"/>
@@ -4778,8 +4778,8 @@
           </a:p>
         </p:txBody>
       </p:sp>
-      <mc:AlternateContent xmlns:mc="http://schemas.openxmlformats.org/markup-compatibility/2006">
-        <mc:Choice xmlns:a14="http://schemas.microsoft.com/office/drawing/2010/main" Requires="a14">
+      <mc:AlternateContent xmlns:mc="http://schemas.openxmlformats.org/markup-compatibility/2006" xmlns:a14="http://schemas.microsoft.com/office/drawing/2010/main">
+        <mc:Choice Requires="a14">
           <p:sp>
             <p:nvSpPr>
               <p:cNvPr id="5" name="CasellaDiTesto 4">
@@ -4831,7 +4831,7 @@
             </p:txBody>
           </p:sp>
         </mc:Choice>
-        <mc:Fallback>
+        <mc:Fallback xmlns="">
           <p:sp>
             <p:nvSpPr>
               <p:cNvPr id="5" name="CasellaDiTesto 4">
@@ -5003,8 +5003,8 @@
           </a:p>
         </p:txBody>
       </p:sp>
-      <mc:AlternateContent xmlns:mc="http://schemas.openxmlformats.org/markup-compatibility/2006">
-        <mc:Choice xmlns:a14="http://schemas.microsoft.com/office/drawing/2010/main" Requires="a14">
+      <mc:AlternateContent xmlns:mc="http://schemas.openxmlformats.org/markup-compatibility/2006" xmlns:a14="http://schemas.microsoft.com/office/drawing/2010/main">
+        <mc:Choice Requires="a14">
           <p:sp>
             <p:nvSpPr>
               <p:cNvPr id="4" name="Rettangolo 3"/>
@@ -5098,7 +5098,7 @@
             </p:txBody>
           </p:sp>
         </mc:Choice>
-        <mc:Fallback>
+        <mc:Fallback xmlns="">
           <p:sp>
             <p:nvSpPr>
               <p:cNvPr id="4" name="Rettangolo 3"/>
@@ -5137,8 +5137,8 @@
           </p:sp>
         </mc:Fallback>
       </mc:AlternateContent>
-      <mc:AlternateContent xmlns:mc="http://schemas.openxmlformats.org/markup-compatibility/2006">
-        <mc:Choice xmlns:a14="http://schemas.microsoft.com/office/drawing/2010/main" Requires="a14">
+      <mc:AlternateContent xmlns:mc="http://schemas.openxmlformats.org/markup-compatibility/2006" xmlns:a14="http://schemas.microsoft.com/office/drawing/2010/main">
+        <mc:Choice Requires="a14">
           <p:graphicFrame>
             <p:nvGraphicFramePr>
               <p:cNvPr id="6" name="Tabella 5"/>
@@ -6076,7 +6076,7 @@
             </a:graphic>
           </p:graphicFrame>
         </mc:Choice>
-        <mc:Fallback>
+        <mc:Fallback xmlns="">
           <p:graphicFrame>
             <p:nvGraphicFramePr>
               <p:cNvPr id="6" name="Tabella 5"/>
@@ -6931,8 +6931,8 @@
           </a:fontRef>
         </p:style>
       </p:cxnSp>
-      <mc:AlternateContent xmlns:mc="http://schemas.openxmlformats.org/markup-compatibility/2006">
-        <mc:Choice xmlns:a14="http://schemas.microsoft.com/office/drawing/2010/main" Requires="a14">
+      <mc:AlternateContent xmlns:mc="http://schemas.openxmlformats.org/markup-compatibility/2006" xmlns:a14="http://schemas.microsoft.com/office/drawing/2010/main">
+        <mc:Choice Requires="a14">
           <p:sp>
             <p:nvSpPr>
               <p:cNvPr id="11" name="CasellaDiTesto 10"/>
@@ -6978,7 +6978,7 @@
             </p:txBody>
           </p:sp>
         </mc:Choice>
-        <mc:Fallback>
+        <mc:Fallback xmlns="">
           <p:sp>
             <p:nvSpPr>
               <p:cNvPr id="11" name="CasellaDiTesto 10"/>
@@ -7017,8 +7017,8 @@
           </p:sp>
         </mc:Fallback>
       </mc:AlternateContent>
-      <mc:AlternateContent xmlns:mc="http://schemas.openxmlformats.org/markup-compatibility/2006">
-        <mc:Choice xmlns:a14="http://schemas.microsoft.com/office/drawing/2010/main" Requires="a14">
+      <mc:AlternateContent xmlns:mc="http://schemas.openxmlformats.org/markup-compatibility/2006" xmlns:a14="http://schemas.microsoft.com/office/drawing/2010/main">
+        <mc:Choice Requires="a14">
           <p:sp>
             <p:nvSpPr>
               <p:cNvPr id="12" name="CasellaDiTesto 11"/>
@@ -7064,7 +7064,7 @@
             </p:txBody>
           </p:sp>
         </mc:Choice>
-        <mc:Fallback>
+        <mc:Fallback xmlns="">
           <p:sp>
             <p:nvSpPr>
               <p:cNvPr id="12" name="CasellaDiTesto 11"/>
@@ -7339,8 +7339,8 @@
           </a:fontRef>
         </p:style>
       </p:cxnSp>
-      <mc:AlternateContent xmlns:mc="http://schemas.openxmlformats.org/markup-compatibility/2006">
-        <mc:Choice xmlns:a14="http://schemas.microsoft.com/office/drawing/2010/main" Requires="a14">
+      <mc:AlternateContent xmlns:mc="http://schemas.openxmlformats.org/markup-compatibility/2006" xmlns:a14="http://schemas.microsoft.com/office/drawing/2010/main">
+        <mc:Choice Requires="a14">
           <p:sp>
             <p:nvSpPr>
               <p:cNvPr id="31" name="Rettangolo 30"/>
@@ -7446,7 +7446,7 @@
             </p:txBody>
           </p:sp>
         </mc:Choice>
-        <mc:Fallback>
+        <mc:Fallback xmlns="">
           <p:sp>
             <p:nvSpPr>
               <p:cNvPr id="31" name="Rettangolo 30"/>
@@ -7485,8 +7485,8 @@
           </p:sp>
         </mc:Fallback>
       </mc:AlternateContent>
-      <mc:AlternateContent xmlns:mc="http://schemas.openxmlformats.org/markup-compatibility/2006">
-        <mc:Choice xmlns:a14="http://schemas.microsoft.com/office/drawing/2010/main" Requires="a14">
+      <mc:AlternateContent xmlns:mc="http://schemas.openxmlformats.org/markup-compatibility/2006" xmlns:a14="http://schemas.microsoft.com/office/drawing/2010/main">
+        <mc:Choice Requires="a14">
           <p:sp>
             <p:nvSpPr>
               <p:cNvPr id="32" name="CasellaDiTesto 31"/>
@@ -7551,7 +7551,7 @@
             </p:txBody>
           </p:sp>
         </mc:Choice>
-        <mc:Fallback>
+        <mc:Fallback xmlns="">
           <p:sp>
             <p:nvSpPr>
               <p:cNvPr id="32" name="CasellaDiTesto 31"/>
@@ -7590,8 +7590,8 @@
           </p:sp>
         </mc:Fallback>
       </mc:AlternateContent>
-      <mc:AlternateContent xmlns:mc="http://schemas.openxmlformats.org/markup-compatibility/2006">
-        <mc:Choice xmlns:a14="http://schemas.microsoft.com/office/drawing/2010/main" Requires="a14">
+      <mc:AlternateContent xmlns:mc="http://schemas.openxmlformats.org/markup-compatibility/2006" xmlns:a14="http://schemas.microsoft.com/office/drawing/2010/main">
+        <mc:Choice Requires="a14">
           <p:sp>
             <p:nvSpPr>
               <p:cNvPr id="33" name="CasellaDiTesto 32"/>
@@ -7656,7 +7656,7 @@
             </p:txBody>
           </p:sp>
         </mc:Choice>
-        <mc:Fallback>
+        <mc:Fallback xmlns="">
           <p:sp>
             <p:nvSpPr>
               <p:cNvPr id="33" name="CasellaDiTesto 32"/>
@@ -7695,8 +7695,8 @@
           </p:sp>
         </mc:Fallback>
       </mc:AlternateContent>
-      <mc:AlternateContent xmlns:mc="http://schemas.openxmlformats.org/markup-compatibility/2006">
-        <mc:Choice xmlns:a14="http://schemas.microsoft.com/office/drawing/2010/main" Requires="a14">
+      <mc:AlternateContent xmlns:mc="http://schemas.openxmlformats.org/markup-compatibility/2006" xmlns:a14="http://schemas.microsoft.com/office/drawing/2010/main">
+        <mc:Choice Requires="a14">
           <p:sp>
             <p:nvSpPr>
               <p:cNvPr id="34" name="CasellaDiTesto 33"/>
@@ -7761,7 +7761,7 @@
             </p:txBody>
           </p:sp>
         </mc:Choice>
-        <mc:Fallback>
+        <mc:Fallback xmlns="">
           <p:sp>
             <p:nvSpPr>
               <p:cNvPr id="34" name="CasellaDiTesto 33"/>
@@ -7800,8 +7800,8 @@
           </p:sp>
         </mc:Fallback>
       </mc:AlternateContent>
-      <mc:AlternateContent xmlns:mc="http://schemas.openxmlformats.org/markup-compatibility/2006">
-        <mc:Choice xmlns:a14="http://schemas.microsoft.com/office/drawing/2010/main" Requires="a14">
+      <mc:AlternateContent xmlns:mc="http://schemas.openxmlformats.org/markup-compatibility/2006" xmlns:a14="http://schemas.microsoft.com/office/drawing/2010/main">
+        <mc:Choice Requires="a14">
           <p:sp>
             <p:nvSpPr>
               <p:cNvPr id="35" name="CasellaDiTesto 34"/>
@@ -7866,7 +7866,7 @@
             </p:txBody>
           </p:sp>
         </mc:Choice>
-        <mc:Fallback>
+        <mc:Fallback xmlns="">
           <p:sp>
             <p:nvSpPr>
               <p:cNvPr id="35" name="CasellaDiTesto 34"/>
@@ -7905,8 +7905,8 @@
           </p:sp>
         </mc:Fallback>
       </mc:AlternateContent>
-      <mc:AlternateContent xmlns:mc="http://schemas.openxmlformats.org/markup-compatibility/2006">
-        <mc:Choice xmlns:a14="http://schemas.microsoft.com/office/drawing/2010/main" Requires="a14">
+      <mc:AlternateContent xmlns:mc="http://schemas.openxmlformats.org/markup-compatibility/2006" xmlns:a14="http://schemas.microsoft.com/office/drawing/2010/main">
+        <mc:Choice Requires="a14">
           <p:sp>
             <p:nvSpPr>
               <p:cNvPr id="36" name="CasellaDiTesto 35"/>
@@ -8095,7 +8095,7 @@
             </p:txBody>
           </p:sp>
         </mc:Choice>
-        <mc:Fallback>
+        <mc:Fallback xmlns="">
           <p:sp>
             <p:nvSpPr>
               <p:cNvPr id="36" name="CasellaDiTesto 35"/>
@@ -8134,8 +8134,8 @@
           </p:sp>
         </mc:Fallback>
       </mc:AlternateContent>
-      <mc:AlternateContent xmlns:mc="http://schemas.openxmlformats.org/markup-compatibility/2006">
-        <mc:Choice xmlns:a14="http://schemas.microsoft.com/office/drawing/2010/main" Requires="a14">
+      <mc:AlternateContent xmlns:mc="http://schemas.openxmlformats.org/markup-compatibility/2006" xmlns:a14="http://schemas.microsoft.com/office/drawing/2010/main">
+        <mc:Choice Requires="a14">
           <p:sp>
             <p:nvSpPr>
               <p:cNvPr id="37" name="CasellaDiTesto 36"/>
@@ -8387,7 +8387,7 @@
             </p:txBody>
           </p:sp>
         </mc:Choice>
-        <mc:Fallback>
+        <mc:Fallback xmlns="">
           <p:sp>
             <p:nvSpPr>
               <p:cNvPr id="37" name="CasellaDiTesto 36"/>
@@ -8773,8 +8773,8 @@
           </a:fontRef>
         </p:style>
       </p:cxnSp>
-      <mc:AlternateContent xmlns:mc="http://schemas.openxmlformats.org/markup-compatibility/2006">
-        <mc:Choice xmlns:a14="http://schemas.microsoft.com/office/drawing/2010/main" Requires="a14">
+      <mc:AlternateContent xmlns:mc="http://schemas.openxmlformats.org/markup-compatibility/2006" xmlns:a14="http://schemas.microsoft.com/office/drawing/2010/main">
+        <mc:Choice Requires="a14">
           <p:sp>
             <p:nvSpPr>
               <p:cNvPr id="42" name="CasellaDiTesto 41"/>
@@ -8820,7 +8820,7 @@
             </p:txBody>
           </p:sp>
         </mc:Choice>
-        <mc:Fallback>
+        <mc:Fallback xmlns="">
           <p:sp>
             <p:nvSpPr>
               <p:cNvPr id="42" name="CasellaDiTesto 41"/>
@@ -8859,8 +8859,8 @@
           </p:sp>
         </mc:Fallback>
       </mc:AlternateContent>
-      <mc:AlternateContent xmlns:mc="http://schemas.openxmlformats.org/markup-compatibility/2006">
-        <mc:Choice xmlns:a14="http://schemas.microsoft.com/office/drawing/2010/main" Requires="a14">
+      <mc:AlternateContent xmlns:mc="http://schemas.openxmlformats.org/markup-compatibility/2006" xmlns:a14="http://schemas.microsoft.com/office/drawing/2010/main">
+        <mc:Choice Requires="a14">
           <p:sp>
             <p:nvSpPr>
               <p:cNvPr id="43" name="CasellaDiTesto 42"/>
@@ -8906,7 +8906,7 @@
             </p:txBody>
           </p:sp>
         </mc:Choice>
-        <mc:Fallback>
+        <mc:Fallback xmlns="">
           <p:sp>
             <p:nvSpPr>
               <p:cNvPr id="43" name="CasellaDiTesto 42"/>
@@ -9239,8 +9239,8 @@
           </a:p>
         </p:txBody>
       </p:sp>
-      <mc:AlternateContent xmlns:mc="http://schemas.openxmlformats.org/markup-compatibility/2006">
-        <mc:Choice xmlns:a14="http://schemas.microsoft.com/office/drawing/2010/main" Requires="a14">
+      <mc:AlternateContent xmlns:mc="http://schemas.openxmlformats.org/markup-compatibility/2006" xmlns:a14="http://schemas.microsoft.com/office/drawing/2010/main">
+        <mc:Choice Requires="a14">
           <p:sp>
             <p:nvSpPr>
               <p:cNvPr id="59" name="Rettangolo 58"/>
@@ -9346,7 +9346,7 @@
             </p:txBody>
           </p:sp>
         </mc:Choice>
-        <mc:Fallback>
+        <mc:Fallback xmlns="">
           <p:sp>
             <p:nvSpPr>
               <p:cNvPr id="59" name="Rettangolo 58"/>
@@ -9385,8 +9385,8 @@
           </p:sp>
         </mc:Fallback>
       </mc:AlternateContent>
-      <mc:AlternateContent xmlns:mc="http://schemas.openxmlformats.org/markup-compatibility/2006">
-        <mc:Choice xmlns:a14="http://schemas.microsoft.com/office/drawing/2010/main" Requires="a14">
+      <mc:AlternateContent xmlns:mc="http://schemas.openxmlformats.org/markup-compatibility/2006" xmlns:a14="http://schemas.microsoft.com/office/drawing/2010/main">
+        <mc:Choice Requires="a14">
           <p:sp>
             <p:nvSpPr>
               <p:cNvPr id="60" name="Rettangolo 59"/>
@@ -9712,7 +9712,7 @@
             </p:txBody>
           </p:sp>
         </mc:Choice>
-        <mc:Fallback>
+        <mc:Fallback xmlns="">
           <p:sp>
             <p:nvSpPr>
               <p:cNvPr id="60" name="Rettangolo 59"/>
@@ -14146,8 +14146,8 @@
           </a:fontRef>
         </p:style>
       </p:cxnSp>
-      <mc:AlternateContent xmlns:mc="http://schemas.openxmlformats.org/markup-compatibility/2006">
-        <mc:Choice xmlns:a14="http://schemas.microsoft.com/office/drawing/2010/main" Requires="a14">
+      <mc:AlternateContent xmlns:mc="http://schemas.openxmlformats.org/markup-compatibility/2006" xmlns:a14="http://schemas.microsoft.com/office/drawing/2010/main">
+        <mc:Choice Requires="a14">
           <p:sp>
             <p:nvSpPr>
               <p:cNvPr id="26" name="CasellaDiTesto 25"/>
@@ -14193,7 +14193,7 @@
             </p:txBody>
           </p:sp>
         </mc:Choice>
-        <mc:Fallback>
+        <mc:Fallback xmlns="">
           <p:sp>
             <p:nvSpPr>
               <p:cNvPr id="26" name="CasellaDiTesto 25"/>
@@ -14232,8 +14232,8 @@
           </p:sp>
         </mc:Fallback>
       </mc:AlternateContent>
-      <mc:AlternateContent xmlns:mc="http://schemas.openxmlformats.org/markup-compatibility/2006">
-        <mc:Choice xmlns:a14="http://schemas.microsoft.com/office/drawing/2010/main" Requires="a14">
+      <mc:AlternateContent xmlns:mc="http://schemas.openxmlformats.org/markup-compatibility/2006" xmlns:a14="http://schemas.microsoft.com/office/drawing/2010/main">
+        <mc:Choice Requires="a14">
           <p:sp>
             <p:nvSpPr>
               <p:cNvPr id="27" name="CasellaDiTesto 26"/>
@@ -14279,7 +14279,7 @@
             </p:txBody>
           </p:sp>
         </mc:Choice>
-        <mc:Fallback>
+        <mc:Fallback xmlns="">
           <p:sp>
             <p:nvSpPr>
               <p:cNvPr id="27" name="CasellaDiTesto 26"/>
@@ -14511,8 +14511,8 @@
           </a:p>
         </p:txBody>
       </p:sp>
-      <mc:AlternateContent xmlns:mc="http://schemas.openxmlformats.org/markup-compatibility/2006">
-        <mc:Choice xmlns:a14="http://schemas.microsoft.com/office/drawing/2010/main" Requires="a14">
+      <mc:AlternateContent xmlns:mc="http://schemas.openxmlformats.org/markup-compatibility/2006" xmlns:a14="http://schemas.microsoft.com/office/drawing/2010/main">
+        <mc:Choice Requires="a14">
           <p:sp>
             <p:nvSpPr>
               <p:cNvPr id="3" name="Segnaposto contenuto 2"/>
@@ -14696,7 +14696,7 @@
             </p:txBody>
           </p:sp>
         </mc:Choice>
-        <mc:Fallback>
+        <mc:Fallback xmlns="">
           <p:sp>
             <p:nvSpPr>
               <p:cNvPr id="3" name="Segnaposto contenuto 2"/>
@@ -14764,8 +14764,8 @@
           </a:prstGeom>
         </p:spPr>
       </p:pic>
-      <mc:AlternateContent xmlns:mc="http://schemas.openxmlformats.org/markup-compatibility/2006">
-        <mc:Choice xmlns:a14="http://schemas.microsoft.com/office/drawing/2010/main" Requires="a14">
+      <mc:AlternateContent xmlns:mc="http://schemas.openxmlformats.org/markup-compatibility/2006" xmlns:a14="http://schemas.microsoft.com/office/drawing/2010/main">
+        <mc:Choice Requires="a14">
           <p:sp>
             <p:nvSpPr>
               <p:cNvPr id="6" name="Rettangolo 5"/>
@@ -14917,7 +14917,7 @@
             </p:txBody>
           </p:sp>
         </mc:Choice>
-        <mc:Fallback>
+        <mc:Fallback xmlns="">
           <p:sp>
             <p:nvSpPr>
               <p:cNvPr id="6" name="Rettangolo 5"/>
@@ -15256,20 +15256,9 @@
             <a:endParaRPr lang="it-IT" dirty="0"/>
           </a:p>
           <a:p>
-            <a:r>
-              <a:rPr lang="it-IT" b="1" dirty="0" err="1"/>
-              <a:t>Repeatability</a:t>
-            </a:r>
-            <a:r>
-              <a:rPr lang="it-IT" dirty="0"/>
-              <a:t>: </a:t>
-            </a:r>
-            <a:r>
-              <a:rPr lang="en-GB" dirty="0"/>
-              <a:t>the ability of a sensor to produce the same output when the same input is applied to it. Lack of repeatability generally occurs due to random fluctuations in environmental inputs or operator error.</a:t>
-            </a:r>
-          </a:p>
-          <a:p>
+            <a:pPr marL="0" indent="0">
+              <a:buNone/>
+            </a:pPr>
             <a:endParaRPr lang="it-IT" dirty="0"/>
           </a:p>
           <a:p>
@@ -19440,8 +19429,8 @@
           </a:fontRef>
         </p:style>
       </p:cxnSp>
-      <mc:AlternateContent xmlns:mc="http://schemas.openxmlformats.org/markup-compatibility/2006">
-        <mc:Choice xmlns:a14="http://schemas.microsoft.com/office/drawing/2010/main" Requires="a14">
+      <mc:AlternateContent xmlns:mc="http://schemas.openxmlformats.org/markup-compatibility/2006" xmlns:a14="http://schemas.microsoft.com/office/drawing/2010/main">
+        <mc:Choice Requires="a14">
           <p:sp>
             <p:nvSpPr>
               <p:cNvPr id="9" name="CasellaDiTesto 8"/>
@@ -19499,7 +19488,7 @@
             </p:txBody>
           </p:sp>
         </mc:Choice>
-        <mc:Fallback>
+        <mc:Fallback xmlns="">
           <p:sp>
             <p:nvSpPr>
               <p:cNvPr id="9" name="CasellaDiTesto 8"/>
@@ -19538,8 +19527,8 @@
           </p:sp>
         </mc:Fallback>
       </mc:AlternateContent>
-      <mc:AlternateContent xmlns:mc="http://schemas.openxmlformats.org/markup-compatibility/2006">
-        <mc:Choice xmlns:a14="http://schemas.microsoft.com/office/drawing/2010/main" Requires="a14">
+      <mc:AlternateContent xmlns:mc="http://schemas.openxmlformats.org/markup-compatibility/2006" xmlns:a14="http://schemas.microsoft.com/office/drawing/2010/main">
+        <mc:Choice Requires="a14">
           <p:sp>
             <p:nvSpPr>
               <p:cNvPr id="10" name="CasellaDiTesto 9"/>
@@ -19585,7 +19574,7 @@
             </p:txBody>
           </p:sp>
         </mc:Choice>
-        <mc:Fallback>
+        <mc:Fallback xmlns="">
           <p:sp>
             <p:nvSpPr>
               <p:cNvPr id="10" name="CasellaDiTesto 9"/>
